--- a/presentation/쉐어택_캡스톤발표.pptx
+++ b/presentation/쉐어택_캡스톤발표.pptx
@@ -114,25 +114,25 @@
   <p:extLst>
     <p:ext uri="{521415D9-36F7-43E2-AB2F-B90AF26B5E84}">
       <p14:sectionLst xmlns:p14="http://schemas.microsoft.com/office/powerpoint/2010/main">
-        <p14:section name="문제" id="{97501d31-6848-bc03-1db7-30ab8e7a1651}">
+        <p14:section name="문제" id="{e6dce759-c74c-f57a-880c-5eb9fb549bca}">
           <p14:sldIdLst>
             <p14:sldId id="256"/>
             <p14:sldId id="257"/>
           </p14:sldIdLst>
         </p14:section>
-        <p14:section name="원인 재정의" id="{9e6c8cfb-9292-4f9e-346a-f2e746d88fb1}">
+        <p14:section name="원인 재정의" id="{e05b4536-79c0-a6f6-db9d-9d3e74b1bc0d}">
           <p14:sldIdLst>
             <p14:sldId id="258"/>
             <p14:sldId id="259"/>
           </p14:sldIdLst>
         </p14:section>
-        <p14:section name="해법과 효과" id="{d0e3a87b-c34d-4c6c-e7ed-5e1143a28786}">
+        <p14:section name="해법과 효과" id="{3f20585f-3632-e3fa-f2d1-499be020d62d}">
           <p14:sldIdLst>
             <p14:sldId id="260"/>
             <p14:sldId id="261"/>
           </p14:sldIdLst>
         </p14:section>
-        <p14:section name="정책과 실행" id="{af762f14-853c-418e-d147-1c0a028c8f72}">
+        <p14:section name="정책과 실행" id="{23df07e6-f559-ada9-2baa-1091ad655251}">
           <p14:sldIdLst>
             <p14:sldId id="262"/>
             <p14:sldId id="263"/>
@@ -1755,7 +1755,7 @@
           <a:p>
             <a:r>
               <a:rPr lang="en-US" dirty="0"/>
-              <a:t>청주 택시 2,956대와 하루 약 5.6만 건의 승차를 TIMS 실측에 맞춰 재현한 시뮬레이션입니다. 합승은 택시 운행 건수를 줄이기 때문에 기사 수입이 0.45~0.9% 줄고, 승객의 할증 부담은 3.7%밖에 줄지 않습니다. 반면 귀로 매칭은 빈 차로 돌아오던 길에 손님을 태우므로 기사 수입이 늘어납니다. 앱 이용률 30%만 돼도 하루 488건, 읍·면에서 시내로 가는 택시의 9.7%가 귀로 매칭이 됩니다. 할증을 면제해 수요가 10% 늘어난다고 가정하면, 보전 없이도 기사 수입이 1.2% 늘어납니다. 다만 수요 증가는 가정이므로 기본 분석에서는 0%로 두었습니다.</a:t>
+              <a:t>청주 택시 2,956대와 하루 약 5.6만 건의 승차를 TIMS 실측에 맞춰 재현한 시뮬레이션입니다. 합승은 택시 운행 건수를 줄이기 때문에 기사 수입이 0.45~0.9% 줄고, 승객의 할증 부담은 3.7%밖에 줄지 않습니다. 반면 귀로 매칭은 빈 차로 돌아오던 길에 손님을 태우므로 기사 수입이 늘어납니다. 앱 이용률 30%면 하루 488건이 귀로 매칭되고, 앱을 쓰는 기사 한 대는 하루 5,774원을 더 법니다. 처음부터 청주 전체가 아니라 오송에 모으면, 같은 기사 수로도 오송의 귀로 매칭이 6배가 됩니다. 할증을 면제해 수요가 10% 늘어난다고 가정하면, 보전 없이도 기사 수입이 1.2% 늘어납니다. 다만 수요 증가는 가정이므로 기본 분석에서는 0%로 두었습니다.</a:t>
             </a:r>
             <a:endParaRPr lang="en-US" dirty="0"/>
           </a:p>
@@ -4107,7 +4107,7 @@
         </p:nvSpPr>
         <p:spPr>
           <a:xfrm>
-            <a:off x="548640" y="3474720"/>
+            <a:off x="548640" y="3383280"/>
             <a:ext cx="3566160" cy="1554480"/>
           </a:xfrm>
           <a:prstGeom prst="rect">
@@ -4122,12 +4122,12 @@
           <a:p>
             <a:pPr eaLnBrk="0" latinLnBrk="0" indent="0" marL="0">
               <a:lnSpc>
-                <a:spcPct val="130000"/>
+                <a:spcPct val="125000"/>
               </a:lnSpc>
               <a:buNone/>
             </a:pPr>
             <a:r>
-              <a:rPr lang="ko-KR" altLang="en-US" sz="1600" b="1" dirty="0">
+              <a:rPr lang="ko-KR" altLang="en-US" sz="1500" b="1" dirty="0">
                 <a:solidFill>
                   <a:srgbClr val="10231C"/>
                 </a:solidFill>
@@ -4136,12 +4136,12 @@
             </a:r>
             <a:pPr eaLnBrk="0" latinLnBrk="0" indent="0" marL="0">
               <a:lnSpc>
-                <a:spcPct val="130000"/>
+                <a:spcPct val="125000"/>
               </a:lnSpc>
               <a:buNone/>
             </a:pPr>
             <a:r>
-              <a:rPr lang="ko-KR" altLang="en-US" sz="1600" dirty="0">
+              <a:rPr lang="ko-KR" altLang="en-US" sz="1500" dirty="0">
                 <a:solidFill>
                   <a:srgbClr val="10231C"/>
                 </a:solidFill>
@@ -4150,12 +4150,12 @@
             </a:r>
             <a:pPr eaLnBrk="0" latinLnBrk="0" indent="0" marL="0">
               <a:lnSpc>
-                <a:spcPct val="130000"/>
+                <a:spcPct val="125000"/>
               </a:lnSpc>
               <a:buNone/>
             </a:pPr>
             <a:r>
-              <a:rPr lang="ko-KR" altLang="en-US" sz="1600" b="1" dirty="0">
+              <a:rPr lang="ko-KR" altLang="en-US" sz="1500" b="1" dirty="0">
                 <a:solidFill>
                   <a:srgbClr val="1D9E75"/>
                 </a:solidFill>
@@ -4164,19 +4164,19 @@
             </a:r>
             <a:pPr eaLnBrk="0" latinLnBrk="0" indent="0" marL="0">
               <a:lnSpc>
-                <a:spcPct val="130000"/>
+                <a:spcPct val="125000"/>
               </a:lnSpc>
               <a:buNone/>
             </a:pPr>
             <a:r>
-              <a:rPr lang="ko-KR" altLang="en-US" sz="1600" dirty="0">
+              <a:rPr lang="ko-KR" altLang="en-US" sz="1500" dirty="0">
                 <a:solidFill>
                   <a:srgbClr val="10231C"/>
                 </a:solidFill>
               </a:rPr>
               <a:t>은 가중치를 6가지로 바꿔도 늘 저위험이다.</a:t>
             </a:r>
-            <a:endParaRPr lang="ko-KR" altLang="en-US" sz="1600" dirty="0"/>
+            <a:endParaRPr lang="ko-KR" altLang="en-US" sz="1500" dirty="0"/>
           </a:p>
         </p:txBody>
       </p:sp>
@@ -4188,7 +4188,7 @@
         </p:nvSpPr>
         <p:spPr>
           <a:xfrm>
-            <a:off x="548640" y="5166360"/>
+            <a:off x="548640" y="5074920"/>
             <a:ext cx="3566160" cy="274320"/>
           </a:xfrm>
           <a:prstGeom prst="rect">
@@ -4211,6 +4211,42 @@
                 </a:solidFill>
               </a:rPr>
               <a:t>기준 대비 순위 상관 0.92~0.99 (스피어만)</a:t>
+            </a:r>
+            <a:endParaRPr lang="ko-KR" altLang="en-US" sz="1300" dirty="0"/>
+          </a:p>
+        </p:txBody>
+      </p:sp>
+      <p:sp>
+        <p:nvSpPr>
+          <p:cNvPr id="8" name="Text 6"/>
+          <p:cNvSpPr txBox="1"/>
+          <p:nvPr/>
+        </p:nvSpPr>
+        <p:spPr>
+          <a:xfrm>
+            <a:off x="548640" y="5440680"/>
+            <a:ext cx="3566160" cy="685800"/>
+          </a:xfrm>
+          <a:prstGeom prst="rect">
+            <a:avLst/>
+          </a:prstGeom>
+          <a:noFill/>
+          <a:ln/>
+        </p:spPr>
+        <p:txBody>
+          <a:bodyPr wrap="square" lIns="0" tIns="0" rIns="0" bIns="0" rtlCol="0" anchor="t"/>
+          <a:lstStyle/>
+          <a:p>
+            <a:pPr eaLnBrk="0" latinLnBrk="0" indent="0" marL="0">
+              <a:buNone/>
+            </a:pPr>
+            <a:r>
+              <a:rPr lang="ko-KR" altLang="en-US" sz="1300" b="1" dirty="0">
+                <a:solidFill>
+                  <a:srgbClr val="1D9E75"/>
+                </a:solidFill>
+              </a:rPr>
+              <a:t>청주시도 복합할증 도입 목적을 "승차난 방지와 공차 손실 보전"이라고 밝혔다 (2026.9 보도)</a:t>
             </a:r>
             <a:endParaRPr lang="ko-KR" altLang="en-US" sz="1300" dirty="0"/>
           </a:p>
@@ -4218,7 +4254,7 @@
       </p:sp>
       <p:pic>
         <p:nvPicPr>
-          <p:cNvPr id="8" name="공차 위험 지도" descr="C:\Users\gysos\OneDrive\Desktop\캡스톤\TAXI\presentation\img\map_risk.png">    </p:cNvPr>
+          <p:cNvPr id="9" name="공차 위험 지도" descr="C:\Users\gysos\OneDrive\Desktop\캡스톤\TAXI\presentation\img\map_risk.png">    </p:cNvPr>
           <p:cNvPicPr>
             <a:picLocks noChangeAspect="1"/>
           </p:cNvPicPr>
@@ -4242,7 +4278,7 @@
       </p:pic>
       <p:sp>
         <p:nvSpPr>
-          <p:cNvPr id="9" name="Shape 6"/>
+          <p:cNvPr id="10" name="Shape 7"/>
           <p:cNvSpPr/>
           <p:nvPr/>
         </p:nvSpPr>
@@ -4267,7 +4303,7 @@
       </p:sp>
       <p:sp>
         <p:nvSpPr>
-          <p:cNvPr id="10" name="Text 7"/>
+          <p:cNvPr id="11" name="Text 8"/>
           <p:cNvSpPr txBox="1"/>
           <p:nvPr/>
         </p:nvSpPr>
@@ -4303,7 +4339,7 @@
       </p:sp>
       <p:sp>
         <p:nvSpPr>
-          <p:cNvPr id="11" name="Shape 8"/>
+          <p:cNvPr id="12" name="Shape 9"/>
           <p:cNvSpPr/>
           <p:nvPr/>
         </p:nvSpPr>
@@ -4328,7 +4364,7 @@
       </p:sp>
       <p:sp>
         <p:nvSpPr>
-          <p:cNvPr id="12" name="Text 9"/>
+          <p:cNvPr id="13" name="Text 10"/>
           <p:cNvSpPr txBox="1"/>
           <p:nvPr/>
         </p:nvSpPr>
@@ -4364,7 +4400,7 @@
       </p:sp>
       <p:sp>
         <p:nvSpPr>
-          <p:cNvPr id="13" name="Shape 10"/>
+          <p:cNvPr id="14" name="Shape 11"/>
           <p:cNvSpPr/>
           <p:nvPr/>
         </p:nvSpPr>
@@ -4389,7 +4425,7 @@
       </p:sp>
       <p:sp>
         <p:nvSpPr>
-          <p:cNvPr id="14" name="Text 11"/>
+          <p:cNvPr id="15" name="Text 12"/>
           <p:cNvSpPr txBox="1"/>
           <p:nvPr/>
         </p:nvSpPr>
@@ -4425,7 +4461,7 @@
       </p:sp>
       <p:sp>
         <p:nvSpPr>
-          <p:cNvPr id="15" name="Shape 12"/>
+          <p:cNvPr id="16" name="Shape 13"/>
           <p:cNvSpPr/>
           <p:nvPr/>
         </p:nvSpPr>
@@ -4450,7 +4486,7 @@
       </p:sp>
       <p:sp>
         <p:nvSpPr>
-          <p:cNvPr id="16" name="Text 13"/>
+          <p:cNvPr id="17" name="Text 14"/>
           <p:cNvSpPr txBox="1"/>
           <p:nvPr/>
         </p:nvSpPr>
@@ -4486,7 +4522,7 @@
       </p:sp>
       <p:sp>
         <p:nvSpPr>
-          <p:cNvPr id="17" name="Shape 14"/>
+          <p:cNvPr id="18" name="Shape 15"/>
           <p:cNvSpPr/>
           <p:nvPr/>
         </p:nvSpPr>
@@ -4511,7 +4547,7 @@
       </p:sp>
       <p:sp>
         <p:nvSpPr>
-          <p:cNvPr id="18" name="Text 15"/>
+          <p:cNvPr id="19" name="Text 16"/>
           <p:cNvSpPr txBox="1"/>
           <p:nvPr/>
         </p:nvSpPr>
@@ -4547,7 +4583,7 @@
       </p:sp>
       <p:graphicFrame>
         <p:nvGraphicFramePr>
-          <p:cNvPr id="19" name="공차 위험 지수 차트" descr=""/>
+          <p:cNvPr id="20" name="공차 위험 지수 차트" descr=""/>
           <p:cNvGraphicFramePr/>
           <p:nvPr/>
         </p:nvGraphicFramePr>
@@ -4563,7 +4599,7 @@
       </p:graphicFrame>
       <p:sp>
         <p:nvSpPr>
-          <p:cNvPr id="20" name="Text 16"/>
+          <p:cNvPr id="21" name="Text 17"/>
           <p:cNvSpPr txBox="1"/>
           <p:nvPr/>
         </p:nvSpPr>
@@ -5628,7 +5664,7 @@
                   <a:srgbClr val="10231C"/>
                 </a:solidFill>
               </a:rPr>
-              <a:t>GPS로 가까운 승차 지점에서 출발</a:t>
+              <a:t>어디서든 출발, 어디로든 도착</a:t>
             </a:r>
             <a:endParaRPr lang="ko-KR" altLang="en-US" sz="1700" dirty="0"/>
           </a:p>
@@ -5664,7 +5700,7 @@
                   <a:srgbClr val="4A5A54"/>
                 </a:solidFill>
               </a:rPr>
-              <a:t>목적지를 고르면 혼자·나눠 타기·귀로 면제 요금을 비교하고, KTX 도착·막차에 맞춰 모집한다</a:t>
+              <a:t>출발·도착을 검색·GPS·지도로 정하면 혼자·나눠 타기·귀로 면제 요금을 비교하고, 반경 1.5km 모집에 참여한다</a:t>
             </a:r>
             <a:endParaRPr lang="ko-KR" altLang="en-US" sz="1200" dirty="0"/>
           </a:p>
@@ -5910,7 +5946,7 @@
                   <a:srgbClr val="1D9E75"/>
                 </a:solidFill>
               </a:rPr>
-              <a:t>3  결과</a:t>
+              <a:t>3  호출 앱과 다른 점</a:t>
             </a:r>
             <a:endParaRPr lang="ko-KR" altLang="en-US" sz="1200" dirty="0"/>
           </a:p>
@@ -5946,7 +5982,7 @@
                   <a:srgbClr val="10231C"/>
                 </a:solidFill>
               </a:rPr>
-              <a:t>귀로가 채워진 운행</a:t>
+              <a:t>차를 부르지 않고, 방향을 맞춘다</a:t>
             </a:r>
             <a:endParaRPr lang="ko-KR" altLang="en-US" sz="1700" dirty="0"/>
           </a:p>
@@ -5982,7 +6018,7 @@
                   <a:srgbClr val="4A5A54"/>
                 </a:solidFill>
               </a:rPr>
-              <a:t>기사는 빈 차 손실이 사라지고, 손님은 귀로 운행 할증 면제(정책안)를 받는다</a:t>
+              <a:t>호출 앱은 가까운 빈 차를 부르고, 쉐어택은 돌아가는 빈 차와 손님의 방향을 잇는다. 할증 면제는 시 정책과 연동</a:t>
             </a:r>
             <a:endParaRPr lang="ko-KR" altLang="en-US" sz="1200" dirty="0"/>
           </a:p>
@@ -5997,11 +6033,11 @@
         <p:spPr>
           <a:xfrm>
             <a:off x="6565392" y="1719072"/>
-            <a:ext cx="2194560" cy="4059936"/>
+            <a:ext cx="2093976" cy="4059936"/>
           </a:xfrm>
           <a:prstGeom prst="roundRect">
             <a:avLst>
-              <a:gd name="adj" fmla="val 6667"/>
+              <a:gd name="adj" fmla="val 6987"/>
             </a:avLst>
           </a:prstGeom>
           <a:solidFill>
@@ -6017,7 +6053,7 @@
       </p:sp>
       <p:pic>
         <p:nvPicPr>
-          <p:cNvPr id="20" name="손님 · 지도에서 출발, 요금 비교" descr="C:\Users\gysos\OneDrive\Desktop\캡스톤\TAXI\presentation\img\shot_ride.png">    </p:cNvPr>
+          <p:cNvPr id="20" name="손님 · 장소 검색, 실제 거리 요금" descr="C:\Users\gysos\OneDrive\Desktop\캡스톤\TAXI\presentation\img\shot_ride.png">    </p:cNvPr>
           <p:cNvPicPr>
             <a:picLocks noChangeAspect="1"/>
           </p:cNvPicPr>
@@ -6032,7 +6068,7 @@
         <p:spPr>
           <a:xfrm>
             <a:off x="6629400" y="1783080"/>
-            <a:ext cx="2066544" cy="3931920"/>
+            <a:ext cx="1965960" cy="3931920"/>
           </a:xfrm>
           <a:prstGeom prst="rect">
             <a:avLst/>
@@ -6048,7 +6084,7 @@
         <p:spPr>
           <a:xfrm>
             <a:off x="6565392" y="5852160"/>
-            <a:ext cx="2340864" cy="274320"/>
+            <a:ext cx="2240280" cy="274320"/>
           </a:xfrm>
           <a:prstGeom prst="rect">
             <a:avLst/>
@@ -6069,7 +6105,7 @@
                   <a:srgbClr val="4A5A54"/>
                 </a:solidFill>
               </a:rPr>
-              <a:t>손님 · 지도에서 출발, 요금 비교</a:t>
+              <a:t>손님 · 장소 검색, 실제 거리 요금</a:t>
             </a:r>
             <a:endParaRPr lang="ko-KR" altLang="en-US" sz="1100" dirty="0"/>
           </a:p>
@@ -6083,7 +6119,7 @@
         </p:nvSpPr>
         <p:spPr>
           <a:xfrm>
-            <a:off x="8906256" y="1719072"/>
+            <a:off x="8805672" y="1719072"/>
             <a:ext cx="2514600" cy="4059936"/>
           </a:xfrm>
           <a:prstGeom prst="roundRect">
@@ -6118,7 +6154,7 @@
         </p:blipFill>
         <p:spPr>
           <a:xfrm>
-            <a:off x="8970264" y="1783080"/>
+            <a:off x="8869680" y="1783080"/>
             <a:ext cx="2386584" cy="3931920"/>
           </a:xfrm>
           <a:prstGeom prst="rect">
@@ -6134,7 +6170,7 @@
         </p:nvSpPr>
         <p:spPr>
           <a:xfrm>
-            <a:off x="8906256" y="5852160"/>
+            <a:off x="8805672" y="5852160"/>
             <a:ext cx="2660904" cy="274320"/>
           </a:xfrm>
           <a:prstGeom prst="rect">
@@ -6498,7 +6534,7 @@
                   <a:srgbClr val="1D9E75"/>
                 </a:solidFill>
               </a:rPr>
-              <a:t>488건/일</a:t>
+              <a:t>+5,774원/일</a:t>
             </a:r>
             <a:endParaRPr lang="ko-KR" altLang="en-US" sz="3000" dirty="0"/>
           </a:p>
@@ -6534,7 +6570,7 @@
                   <a:srgbClr val="10231C"/>
                 </a:solidFill>
               </a:rPr>
-              <a:t>귀로 매칭 (앱 이용 30%)</a:t>
+              <a:t>쉐어택 참여 기사 1대 하루 수입 (+1.86%)</a:t>
             </a:r>
             <a:endParaRPr lang="ko-KR" altLang="en-US" sz="1500" dirty="0"/>
           </a:p>
@@ -6570,7 +6606,7 @@
                   <a:srgbClr val="4A5A54"/>
                 </a:solidFill>
               </a:rPr>
-              <a:t>읍·면→시내 택시의 9.7%가 빈 차 대신 손님을 태워 돌아온다</a:t>
+              <a:t>앱 30% 기준. 전체 평균(+0.16%)에는 비참여 기사가 섞여 묽어진다</a:t>
             </a:r>
             <a:endParaRPr lang="ko-KR" altLang="en-US" sz="1200" dirty="0"/>
           </a:p>
@@ -6606,7 +6642,7 @@
                   <a:srgbClr val="1D9E75"/>
                 </a:solidFill>
               </a:rPr>
-              <a:t>+1.2%</a:t>
+              <a:t>6배</a:t>
             </a:r>
             <a:endParaRPr lang="ko-KR" altLang="en-US" sz="3000" dirty="0"/>
           </a:p>
@@ -6642,7 +6678,7 @@
                   <a:srgbClr val="10231C"/>
                 </a:solidFill>
               </a:rPr>
-              <a:t>면제로 수요가 10% 늘 때 기사 수입</a:t>
+              <a:t>오송 거점 집중 시 귀로 매칭 (하루 6→36건)</a:t>
             </a:r>
             <a:endParaRPr lang="ko-KR" altLang="en-US" sz="1500" dirty="0"/>
           </a:p>
@@ -6678,7 +6714,7 @@
                   <a:srgbClr val="4A5A54"/>
                 </a:solidFill>
               </a:rPr>
-              <a:t>할증을 전액 면제하고 보전이 없어도 기사 수입이 늘어난다</a:t>
+              <a:t>기사 앱 10%는 같고, 승객 앱을 청주 전체 대신 오송에 모았을 때</a:t>
             </a:r>
             <a:endParaRPr lang="ko-KR" altLang="en-US" sz="1200" dirty="0"/>
           </a:p>
@@ -8829,11 +8865,11 @@
         <p:spPr>
           <a:xfrm>
             <a:off x="548640" y="1783080"/>
-            <a:ext cx="3566160" cy="2743200"/>
+            <a:ext cx="3566160" cy="3017520"/>
           </a:xfrm>
           <a:prstGeom prst="roundRect">
             <a:avLst>
-              <a:gd name="adj" fmla="val 5333"/>
+              <a:gd name="adj" fmla="val 4848"/>
             </a:avLst>
           </a:prstGeom>
           <a:solidFill>
@@ -8916,7 +8952,7 @@
         <p:spPr>
           <a:xfrm>
             <a:off x="822960" y="2880360"/>
-            <a:ext cx="3063240" cy="1554480"/>
+            <a:ext cx="3063240" cy="1828800"/>
           </a:xfrm>
           <a:prstGeom prst="rect">
             <a:avLst/>
@@ -8930,38 +8966,56 @@
           <a:p>
             <a:pPr eaLnBrk="0" latinLnBrk="0" marL="342900" indent="-342900">
               <a:spcAft>
-                <a:spcPts val="600"/>
+                <a:spcPts val="400"/>
               </a:spcAft>
               <a:buSzPct val="100000"/>
               <a:buChar char="•"/>
             </a:pPr>
             <a:r>
-              <a:rPr lang="ko-KR" altLang="en-US" sz="1400" dirty="0">
+              <a:rPr lang="ko-KR" altLang="en-US" sz="1300" dirty="0">
                 <a:solidFill>
                   <a:srgbClr val="A9B8B1"/>
                 </a:solidFill>
               </a:rPr>
-              <a:t>택시발전법 시행규칙 제11조의2 준수: 본인 확인, 탑승 시점·위치·좌석 사전 고지, 동성끼리</a:t>
-            </a:r>
-            <a:endParaRPr lang="ko-KR" altLang="en-US" sz="1400" dirty="0"/>
+              <a:t>택시발전법 시행규칙 제11조의2: 본인 확인·좌석 사전 고지·동성끼리</a:t>
+            </a:r>
+            <a:endParaRPr lang="ko-KR" altLang="en-US" sz="1300" dirty="0"/>
           </a:p>
           <a:p>
             <a:pPr eaLnBrk="0" latinLnBrk="0" marL="342900" indent="-342900">
               <a:spcAft>
-                <a:spcPts val="600"/>
+                <a:spcPts val="400"/>
               </a:spcAft>
               <a:buSzPct val="100000"/>
               <a:buChar char="•"/>
             </a:pPr>
             <a:r>
-              <a:rPr lang="ko-KR" altLang="en-US" sz="1400" dirty="0">
+              <a:rPr lang="ko-KR" altLang="en-US" sz="1300" dirty="0">
                 <a:solidFill>
                   <a:srgbClr val="A9B8B1"/>
                 </a:solidFill>
               </a:rPr>
-              <a:t>배차는 등록 호출 플랫폼 제휴 또는 규제샌드박스 실증</a:t>
-            </a:r>
-            <a:endParaRPr lang="ko-KR" altLang="en-US" sz="1400" dirty="0"/>
+              <a:t>선례: 반반택시 2019 실증특례 → 2022 동승 합법화</a:t>
+            </a:r>
+            <a:endParaRPr lang="ko-KR" altLang="en-US" sz="1300" dirty="0"/>
+          </a:p>
+          <a:p>
+            <a:pPr eaLnBrk="0" latinLnBrk="0" marL="342900" indent="-342900">
+              <a:spcAft>
+                <a:spcPts val="400"/>
+              </a:spcAft>
+              <a:buSzPct val="100000"/>
+              <a:buChar char="•"/>
+            </a:pPr>
+            <a:r>
+              <a:rPr lang="ko-KR" altLang="en-US" sz="1300" dirty="0">
+                <a:solidFill>
+                  <a:srgbClr val="A9B8B1"/>
+                </a:solidFill>
+              </a:rPr>
+              <a:t>실명 가입·지인 탑승 알림 반영</a:t>
+            </a:r>
+            <a:endParaRPr lang="ko-KR" altLang="en-US" sz="1300" dirty="0"/>
           </a:p>
         </p:txBody>
       </p:sp>
@@ -8974,11 +9028,11 @@
         <p:spPr>
           <a:xfrm>
             <a:off x="4297680" y="1783080"/>
-            <a:ext cx="3566160" cy="2743200"/>
+            <a:ext cx="3566160" cy="3017520"/>
           </a:xfrm>
           <a:prstGeom prst="roundRect">
             <a:avLst>
-              <a:gd name="adj" fmla="val 5333"/>
+              <a:gd name="adj" fmla="val 4848"/>
             </a:avLst>
           </a:prstGeom>
           <a:solidFill>
@@ -9061,7 +9115,7 @@
         <p:spPr>
           <a:xfrm>
             <a:off x="4572000" y="2880360"/>
-            <a:ext cx="3063240" cy="1554480"/>
+            <a:ext cx="3063240" cy="1828800"/>
           </a:xfrm>
           <a:prstGeom prst="rect">
             <a:avLst/>
@@ -9075,56 +9129,74 @@
           <a:p>
             <a:pPr eaLnBrk="0" latinLnBrk="0" marL="342900" indent="-342900">
               <a:spcAft>
-                <a:spcPts val="600"/>
+                <a:spcPts val="400"/>
               </a:spcAft>
               <a:buSzPct val="100000"/>
               <a:buChar char="•"/>
             </a:pPr>
             <a:r>
-              <a:rPr lang="ko-KR" altLang="en-US" sz="1400" dirty="0">
+              <a:rPr lang="ko-KR" altLang="en-US" sz="1300" dirty="0">
                 <a:solidFill>
                   <a:srgbClr val="A9B8B1"/>
                 </a:solidFill>
               </a:rPr>
-              <a:t>11월 오송역 시범 운영(체험 계정)</a:t>
-            </a:r>
-            <a:endParaRPr lang="ko-KR" altLang="en-US" sz="1400" dirty="0"/>
+              <a:t>오송역 한 곳·KTX 도착 시간대에 집중해 시작</a:t>
+            </a:r>
+            <a:endParaRPr lang="ko-KR" altLang="en-US" sz="1300" dirty="0"/>
           </a:p>
           <a:p>
             <a:pPr eaLnBrk="0" latinLnBrk="0" marL="342900" indent="-342900">
               <a:spcAft>
-                <a:spcPts val="600"/>
+                <a:spcPts val="400"/>
               </a:spcAft>
               <a:buSzPct val="100000"/>
               <a:buChar char="•"/>
             </a:pPr>
             <a:r>
-              <a:rPr lang="ko-KR" altLang="en-US" sz="1400" dirty="0">
+              <a:rPr lang="ko-KR" altLang="en-US" sz="1300" dirty="0">
                 <a:solidFill>
                   <a:srgbClr val="A9B8B1"/>
                 </a:solidFill>
               </a:rPr>
-              <a:t>기사 인터뷰 [5명] · 시민 설문 [__명]</a:t>
-            </a:r>
-            <a:endParaRPr lang="ko-KR" altLang="en-US" sz="1400" dirty="0"/>
+              <a:t>오송역 승강장 택시 단체 1곳과 제휴</a:t>
+            </a:r>
+            <a:endParaRPr lang="ko-KR" altLang="en-US" sz="1300" dirty="0"/>
           </a:p>
           <a:p>
             <a:pPr eaLnBrk="0" latinLnBrk="0" marL="342900" indent="-342900">
               <a:spcAft>
-                <a:spcPts val="600"/>
+                <a:spcPts val="400"/>
               </a:spcAft>
               <a:buSzPct val="100000"/>
               <a:buChar char="•"/>
             </a:pPr>
             <a:r>
-              <a:rPr lang="ko-KR" altLang="en-US" sz="1400" dirty="0">
+              <a:rPr lang="ko-KR" altLang="en-US" sz="1300" dirty="0">
                 <a:solidFill>
                   <a:srgbClr val="A9B8B1"/>
                 </a:solidFill>
               </a:rPr>
-              <a:t>오송·오창 2개 거점 실증 후 귀로 할증 면제 고시 건의</a:t>
-            </a:r>
-            <a:endParaRPr lang="ko-KR" altLang="en-US" sz="1400" dirty="0"/>
+              <a:t>기사 인터뷰 [5명] · 설문 [__명] · 현장 관찰</a:t>
+            </a:r>
+            <a:endParaRPr lang="ko-KR" altLang="en-US" sz="1300" dirty="0"/>
+          </a:p>
+          <a:p>
+            <a:pPr eaLnBrk="0" latinLnBrk="0" marL="342900" indent="-342900">
+              <a:spcAft>
+                <a:spcPts val="400"/>
+              </a:spcAft>
+              <a:buSzPct val="100000"/>
+              <a:buChar char="•"/>
+            </a:pPr>
+            <a:r>
+              <a:rPr lang="ko-KR" altLang="en-US" sz="1300" dirty="0">
+                <a:solidFill>
+                  <a:srgbClr val="A9B8B1"/>
+                </a:solidFill>
+              </a:rPr>
+              <a:t>실증 결과로 귀로 할증 면제 고시 건의</a:t>
+            </a:r>
+            <a:endParaRPr lang="ko-KR" altLang="en-US" sz="1300" dirty="0"/>
           </a:p>
         </p:txBody>
       </p:sp>
@@ -9137,11 +9209,11 @@
         <p:spPr>
           <a:xfrm>
             <a:off x="8046720" y="1783080"/>
-            <a:ext cx="3566160" cy="2743200"/>
+            <a:ext cx="3566160" cy="3017520"/>
           </a:xfrm>
           <a:prstGeom prst="roundRect">
             <a:avLst>
-              <a:gd name="adj" fmla="val 5333"/>
+              <a:gd name="adj" fmla="val 4848"/>
             </a:avLst>
           </a:prstGeom>
           <a:solidFill>
@@ -9224,7 +9296,7 @@
         <p:spPr>
           <a:xfrm>
             <a:off x="8321040" y="2880360"/>
-            <a:ext cx="3063240" cy="1554480"/>
+            <a:ext cx="3063240" cy="1828800"/>
           </a:xfrm>
           <a:prstGeom prst="rect">
             <a:avLst/>
@@ -9238,56 +9310,56 @@
           <a:p>
             <a:pPr eaLnBrk="0" latinLnBrk="0" marL="342900" indent="-342900">
               <a:spcAft>
-                <a:spcPts val="600"/>
+                <a:spcPts val="400"/>
               </a:spcAft>
               <a:buSzPct val="100000"/>
               <a:buChar char="•"/>
             </a:pPr>
             <a:r>
-              <a:rPr lang="ko-KR" altLang="en-US" sz="1400" dirty="0">
+              <a:rPr lang="ko-KR" altLang="en-US" sz="1300" dirty="0">
                 <a:solidFill>
                   <a:srgbClr val="A9B8B1"/>
                 </a:solidFill>
               </a:rPr>
               <a:t>결과는 시뮬레이션이며 실측이 아니다</a:t>
             </a:r>
-            <a:endParaRPr lang="ko-KR" altLang="en-US" sz="1400" dirty="0"/>
+            <a:endParaRPr lang="ko-KR" altLang="en-US" sz="1300" dirty="0"/>
           </a:p>
           <a:p>
             <a:pPr eaLnBrk="0" latinLnBrk="0" marL="342900" indent="-342900">
               <a:spcAft>
-                <a:spcPts val="600"/>
+                <a:spcPts val="400"/>
               </a:spcAft>
               <a:buSzPct val="100000"/>
               <a:buChar char="•"/>
             </a:pPr>
             <a:r>
-              <a:rPr lang="ko-KR" altLang="en-US" sz="1400" dirty="0">
+              <a:rPr lang="ko-KR" altLang="en-US" sz="1300" dirty="0">
                 <a:solidFill>
                   <a:srgbClr val="A9B8B1"/>
                 </a:solidFill>
               </a:rPr>
               <a:t>OD는 KTDB 2024 평일 자료(비공개 처리)</a:t>
             </a:r>
-            <a:endParaRPr lang="ko-KR" altLang="en-US" sz="1400" dirty="0"/>
+            <a:endParaRPr lang="ko-KR" altLang="en-US" sz="1300" dirty="0"/>
           </a:p>
           <a:p>
             <a:pPr eaLnBrk="0" latinLnBrk="0" marL="342900" indent="-342900">
               <a:spcAft>
-                <a:spcPts val="600"/>
+                <a:spcPts val="400"/>
               </a:spcAft>
               <a:buSzPct val="100000"/>
               <a:buChar char="•"/>
             </a:pPr>
             <a:r>
-              <a:rPr lang="ko-KR" altLang="en-US" sz="1400" dirty="0">
+              <a:rPr lang="ko-KR" altLang="en-US" sz="1300" dirty="0">
                 <a:solidFill>
                   <a:srgbClr val="A9B8B1"/>
                 </a:solidFill>
               </a:rPr>
               <a:t>요율은 보도 기준(원문 확인 중)</a:t>
             </a:r>
-            <a:endParaRPr lang="ko-KR" altLang="en-US" sz="1400" dirty="0"/>
+            <a:endParaRPr lang="ko-KR" altLang="en-US" sz="1300" dirty="0"/>
           </a:p>
         </p:txBody>
       </p:sp>
